--- a/20261007_簡易ページからサンクスLINEへの導線.pptx
+++ b/20261007_簡易ページからサンクスLINEへの導線.pptx
@@ -2794,7 +2794,7 @@
             </a:avLst>
           </a:prstGeom>
           <a:solidFill>
-            <a:srgbClr val="FEF0DE"/>
+            <a:srgbClr val="E4E8F6"/>
           </a:solidFill>
           <a:ln>
             <a:noFill/>
@@ -2856,7 +2856,7 @@
             <a:r>
               <a:rPr sz="1300" b="1">
                 <a:solidFill>
-                  <a:srgbClr val="C46A00"/>
+                  <a:srgbClr val="1F285A"/>
                 </a:solidFill>
                 <a:latin typeface="メイリオ"/>
                 <a:ea typeface="メイリオ"/>
@@ -2884,7 +2884,7 @@
             </a:avLst>
           </a:prstGeom>
           <a:solidFill>
-            <a:srgbClr val="F59B21"/>
+            <a:srgbClr val="1F285A"/>
           </a:solidFill>
           <a:ln>
             <a:noFill/>
@@ -2974,7 +2974,7 @@
             </a:avLst>
           </a:prstGeom>
           <a:solidFill>
-            <a:srgbClr val="F59B21"/>
+            <a:srgbClr val="1F285A"/>
           </a:solidFill>
           <a:ln>
             <a:noFill/>
@@ -3527,7 +3527,7 @@
             <a:avLst/>
           </a:prstGeom>
           <a:solidFill>
-            <a:srgbClr val="F59B21"/>
+            <a:srgbClr val="1F285A"/>
           </a:solidFill>
           <a:ln>
             <a:noFill/>
@@ -3589,7 +3589,7 @@
             <a:r>
               <a:rPr sz="1300" b="1">
                 <a:solidFill>
-                  <a:srgbClr val="C46A00"/>
+                  <a:srgbClr val="1F285A"/>
                 </a:solidFill>
                 <a:latin typeface="メイリオ"/>
                 <a:ea typeface="メイリオ"/>
@@ -3745,7 +3745,7 @@
           </a:solidFill>
           <a:ln w="9525">
             <a:solidFill>
-              <a:srgbClr val="F59B21"/>
+              <a:srgbClr val="1F285A"/>
             </a:solidFill>
           </a:ln>
           <a:effectLst/>
@@ -3779,7 +3779,7 @@
             <a:r>
               <a:rPr sz="1000" b="1">
                 <a:solidFill>
-                  <a:srgbClr val="C46A00"/>
+                  <a:srgbClr val="1F285A"/>
                 </a:solidFill>
                 <a:latin typeface="メイリオ"/>
                 <a:ea typeface="メイリオ"/>
@@ -3811,7 +3811,7 @@
           </a:solidFill>
           <a:ln w="9525">
             <a:solidFill>
-              <a:srgbClr val="F59B21"/>
+              <a:srgbClr val="1F285A"/>
             </a:solidFill>
           </a:ln>
           <a:effectLst/>
@@ -3845,7 +3845,7 @@
             <a:r>
               <a:rPr sz="1000" b="1">
                 <a:solidFill>
-                  <a:srgbClr val="C46A00"/>
+                  <a:srgbClr val="1F285A"/>
                 </a:solidFill>
                 <a:latin typeface="メイリオ"/>
                 <a:ea typeface="メイリオ"/>
@@ -3877,7 +3877,7 @@
           </a:solidFill>
           <a:ln w="9525">
             <a:solidFill>
-              <a:srgbClr val="F59B21"/>
+              <a:srgbClr val="1F285A"/>
             </a:solidFill>
           </a:ln>
           <a:effectLst/>
@@ -3911,7 +3911,7 @@
             <a:r>
               <a:rPr sz="1000" b="1">
                 <a:solidFill>
-                  <a:srgbClr val="C46A00"/>
+                  <a:srgbClr val="1F285A"/>
                 </a:solidFill>
                 <a:latin typeface="メイリオ"/>
                 <a:ea typeface="メイリオ"/>
